--- a/Turbofan_Engine_RUL_Presentation.pptx
+++ b/Turbofan_Engine_RUL_Presentation.pptx
@@ -20570,7 +20570,7 @@
                   <a:srgbClr val="FFFFFF"/>
                 </a:solidFill>
               </a:rPr>
-              <a:t>Report &amp; slides</a:t>
+              <a:t>EDA &amp; baseline</a:t>
             </a:r>
             <a:endParaRPr lang="en-US" sz="1800" dirty="0"/>
           </a:p>
@@ -20584,7 +20584,7 @@
                   <a:srgbClr val="B8C7D4"/>
                 </a:solidFill>
               </a:rPr>
-              <a:t>Keshav</a:t>
+              <a:t>Rohit Kumar</a:t>
             </a:r>
             <a:endParaRPr lang="en-US" sz="1800" dirty="0"/>
           </a:p>
@@ -20645,7 +20645,7 @@
                   <a:srgbClr val="FFFFFF"/>
                 </a:solidFill>
               </a:rPr>
-              <a:t>EDA &amp; baseline</a:t>
+              <a:t>Feature engineering</a:t>
             </a:r>
             <a:endParaRPr lang="en-US" sz="1800" dirty="0"/>
           </a:p>
@@ -20659,7 +20659,7 @@
                   <a:srgbClr val="B8C7D4"/>
                 </a:solidFill>
               </a:rPr>
-              <a:t>Rohit Kumar</a:t>
+              <a:t>Mayank Yadav</a:t>
             </a:r>
             <a:endParaRPr lang="en-US" sz="1800" dirty="0"/>
           </a:p>
@@ -20720,7 +20720,7 @@
                   <a:srgbClr val="FFFFFF"/>
                 </a:solidFill>
               </a:rPr>
-              <a:t>Feature engineering</a:t>
+              <a:t>Decision Tree &amp; app</a:t>
             </a:r>
             <a:endParaRPr lang="en-US" sz="1800" dirty="0"/>
           </a:p>
@@ -20734,7 +20734,7 @@
                   <a:srgbClr val="B8C7D4"/>
                 </a:solidFill>
               </a:rPr>
-              <a:t>Mayank Yadav</a:t>
+              <a:t>Arun</a:t>
             </a:r>
             <a:endParaRPr lang="en-US" sz="1800" dirty="0"/>
           </a:p>
@@ -20795,7 +20795,7 @@
                   <a:srgbClr val="FFFFFF"/>
                 </a:solidFill>
               </a:rPr>
-              <a:t>Tree models &amp; app</a:t>
+              <a:t>Random Forest</a:t>
             </a:r>
             <a:endParaRPr lang="en-US" sz="1800" dirty="0"/>
           </a:p>
@@ -20809,7 +20809,7 @@
                   <a:srgbClr val="B8C7D4"/>
                 </a:solidFill>
               </a:rPr>
-              <a:t>Arun</a:t>
+              <a:t>Keshav</a:t>
             </a:r>
             <a:endParaRPr lang="en-US" sz="1800" dirty="0"/>
           </a:p>
@@ -21117,191 +21117,6 @@
                             <a:srgbClr val="1B2A38"/>
                           </a:solidFill>
                         </a:rPr>
-                        <a:t>2401010221</a:t>
-                      </a:r>
-                      <a:endParaRPr lang="en-US" sz="1800" dirty="0"/>
-                    </a:p>
-                  </a:txBody>
-                  <a:tcPr marL="137160" marR="137160" marT="45720" marB="45720" anchor="ctr">
-                    <a:lnL w="9525" cap="flat" cmpd="sng" algn="ctr">
-                      <a:solidFill>
-                        <a:srgbClr val="C9D3DC"/>
-                      </a:solidFill>
-                      <a:prstDash val="solid"/>
-                      <a:round/>
-                      <a:headEnd type="none" w="med" len="med"/>
-                      <a:tailEnd type="none" w="med" len="med"/>
-                    </a:lnL>
-                    <a:lnR w="9525" cap="flat" cmpd="sng" algn="ctr">
-                      <a:solidFill>
-                        <a:srgbClr val="C9D3DC"/>
-                      </a:solidFill>
-                      <a:prstDash val="solid"/>
-                      <a:round/>
-                      <a:headEnd type="none" w="med" len="med"/>
-                      <a:tailEnd type="none" w="med" len="med"/>
-                    </a:lnR>
-                    <a:lnT w="9525" cap="flat" cmpd="sng" algn="ctr">
-                      <a:solidFill>
-                        <a:srgbClr val="C9D3DC"/>
-                      </a:solidFill>
-                      <a:prstDash val="solid"/>
-                      <a:round/>
-                      <a:headEnd type="none" w="med" len="med"/>
-                      <a:tailEnd type="none" w="med" len="med"/>
-                    </a:lnT>
-                    <a:lnB w="9525" cap="flat" cmpd="sng" algn="ctr">
-                      <a:solidFill>
-                        <a:srgbClr val="C9D3DC"/>
-                      </a:solidFill>
-                      <a:prstDash val="solid"/>
-                      <a:round/>
-                      <a:headEnd type="none" w="med" len="med"/>
-                      <a:tailEnd type="none" w="med" len="med"/>
-                    </a:lnB>
-                    <a:solidFill>
-                      <a:srgbClr val="FFFFFF"/>
-                    </a:solidFill>
-                  </a:tcPr>
-                </a:tc>
-                <a:tc>
-                  <a:txBody>
-                    <a:bodyPr/>
-                    <a:lstStyle/>
-                    <a:p>
-                      <a:pPr indent="0" marL="0">
-                        <a:buNone/>
-                      </a:pPr>
-                      <a:r>
-                        <a:rPr lang="en-US" sz="2000" b="1" dirty="0">
-                          <a:solidFill>
-                            <a:srgbClr val="1B2A38"/>
-                          </a:solidFill>
-                        </a:rPr>
-                        <a:t>Keshav</a:t>
-                      </a:r>
-                      <a:endParaRPr lang="en-US" sz="2000" dirty="0"/>
-                    </a:p>
-                  </a:txBody>
-                  <a:tcPr marL="137160" marR="137160" marT="45720" marB="45720" anchor="ctr">
-                    <a:lnL w="9525" cap="flat" cmpd="sng" algn="ctr">
-                      <a:solidFill>
-                        <a:srgbClr val="C9D3DC"/>
-                      </a:solidFill>
-                      <a:prstDash val="solid"/>
-                      <a:round/>
-                      <a:headEnd type="none" w="med" len="med"/>
-                      <a:tailEnd type="none" w="med" len="med"/>
-                    </a:lnL>
-                    <a:lnR w="9525" cap="flat" cmpd="sng" algn="ctr">
-                      <a:solidFill>
-                        <a:srgbClr val="C9D3DC"/>
-                      </a:solidFill>
-                      <a:prstDash val="solid"/>
-                      <a:round/>
-                      <a:headEnd type="none" w="med" len="med"/>
-                      <a:tailEnd type="none" w="med" len="med"/>
-                    </a:lnR>
-                    <a:lnT w="9525" cap="flat" cmpd="sng" algn="ctr">
-                      <a:solidFill>
-                        <a:srgbClr val="C9D3DC"/>
-                      </a:solidFill>
-                      <a:prstDash val="solid"/>
-                      <a:round/>
-                      <a:headEnd type="none" w="med" len="med"/>
-                      <a:tailEnd type="none" w="med" len="med"/>
-                    </a:lnT>
-                    <a:lnB w="9525" cap="flat" cmpd="sng" algn="ctr">
-                      <a:solidFill>
-                        <a:srgbClr val="C9D3DC"/>
-                      </a:solidFill>
-                      <a:prstDash val="solid"/>
-                      <a:round/>
-                      <a:headEnd type="none" w="med" len="med"/>
-                      <a:tailEnd type="none" w="med" len="med"/>
-                    </a:lnB>
-                    <a:solidFill>
-                      <a:srgbClr val="FFFFFF"/>
-                    </a:solidFill>
-                  </a:tcPr>
-                </a:tc>
-                <a:tc>
-                  <a:txBody>
-                    <a:bodyPr/>
-                    <a:lstStyle/>
-                    <a:p>
-                      <a:pPr indent="0" marL="0">
-                        <a:buNone/>
-                      </a:pPr>
-                      <a:r>
-                        <a:rPr lang="en-US" sz="1800" dirty="0">
-                          <a:solidFill>
-                            <a:srgbClr val="1B2A38"/>
-                          </a:solidFill>
-                        </a:rPr>
-                        <a:t>Results write-up: compiled validation and test results, wrote the project report and built this presentation.</a:t>
-                      </a:r>
-                      <a:endParaRPr lang="en-US" sz="1800" dirty="0"/>
-                    </a:p>
-                  </a:txBody>
-                  <a:tcPr marL="137160" marR="137160" marT="45720" marB="45720" anchor="ctr">
-                    <a:lnL w="9525" cap="flat" cmpd="sng" algn="ctr">
-                      <a:solidFill>
-                        <a:srgbClr val="C9D3DC"/>
-                      </a:solidFill>
-                      <a:prstDash val="solid"/>
-                      <a:round/>
-                      <a:headEnd type="none" w="med" len="med"/>
-                      <a:tailEnd type="none" w="med" len="med"/>
-                    </a:lnL>
-                    <a:lnR w="9525" cap="flat" cmpd="sng" algn="ctr">
-                      <a:solidFill>
-                        <a:srgbClr val="C9D3DC"/>
-                      </a:solidFill>
-                      <a:prstDash val="solid"/>
-                      <a:round/>
-                      <a:headEnd type="none" w="med" len="med"/>
-                      <a:tailEnd type="none" w="med" len="med"/>
-                    </a:lnR>
-                    <a:lnT w="9525" cap="flat" cmpd="sng" algn="ctr">
-                      <a:solidFill>
-                        <a:srgbClr val="C9D3DC"/>
-                      </a:solidFill>
-                      <a:prstDash val="solid"/>
-                      <a:round/>
-                      <a:headEnd type="none" w="med" len="med"/>
-                      <a:tailEnd type="none" w="med" len="med"/>
-                    </a:lnT>
-                    <a:lnB w="9525" cap="flat" cmpd="sng" algn="ctr">
-                      <a:solidFill>
-                        <a:srgbClr val="C9D3DC"/>
-                      </a:solidFill>
-                      <a:prstDash val="solid"/>
-                      <a:round/>
-                      <a:headEnd type="none" w="med" len="med"/>
-                      <a:tailEnd type="none" w="med" len="med"/>
-                    </a:lnB>
-                    <a:solidFill>
-                      <a:srgbClr val="FFFFFF"/>
-                    </a:solidFill>
-                  </a:tcPr>
-                </a:tc>
-              </a:tr>
-              <a:tr h="1024128">
-                <a:tc>
-                  <a:txBody>
-                    <a:bodyPr/>
-                    <a:lstStyle/>
-                    <a:p>
-                      <a:pPr indent="0" marL="0">
-                        <a:buNone/>
-                      </a:pPr>
-                      <a:r>
-                        <a:rPr lang="en-US" sz="1800" dirty="0">
-                          <a:solidFill>
-                            <a:srgbClr val="1B2A38"/>
-                          </a:solidFill>
-                        </a:rPr>
                         <a:t>2401010392</a:t>
                       </a:r>
                       <a:endParaRPr lang="en-US" sz="1800" dirty="0"/>
@@ -21345,7 +21160,7 @@
                       <a:tailEnd type="none" w="med" len="med"/>
                     </a:lnB>
                     <a:solidFill>
-                      <a:srgbClr val="ECF1F5"/>
+                      <a:srgbClr val="FFFFFF"/>
                     </a:solidFill>
                   </a:tcPr>
                 </a:tc>
@@ -21406,7 +21221,7 @@
                       <a:tailEnd type="none" w="med" len="med"/>
                     </a:lnB>
                     <a:solidFill>
-                      <a:srgbClr val="ECF1F5"/>
+                      <a:srgbClr val="FFFFFF"/>
                     </a:solidFill>
                   </a:tcPr>
                 </a:tc>
@@ -21467,7 +21282,7 @@
                       <a:tailEnd type="none" w="med" len="med"/>
                     </a:lnB>
                     <a:solidFill>
-                      <a:srgbClr val="ECF1F5"/>
+                      <a:srgbClr val="FFFFFF"/>
                     </a:solidFill>
                   </a:tcPr>
                 </a:tc>
@@ -21530,7 +21345,7 @@
                       <a:tailEnd type="none" w="med" len="med"/>
                     </a:lnB>
                     <a:solidFill>
-                      <a:srgbClr val="FFFFFF"/>
+                      <a:srgbClr val="ECF1F5"/>
                     </a:solidFill>
                   </a:tcPr>
                 </a:tc>
@@ -21591,7 +21406,7 @@
                       <a:tailEnd type="none" w="med" len="med"/>
                     </a:lnB>
                     <a:solidFill>
-                      <a:srgbClr val="FFFFFF"/>
+                      <a:srgbClr val="ECF1F5"/>
                     </a:solidFill>
                   </a:tcPr>
                 </a:tc>
@@ -21652,7 +21467,7 @@
                       <a:tailEnd type="none" w="med" len="med"/>
                     </a:lnB>
                     <a:solidFill>
-                      <a:srgbClr val="FFFFFF"/>
+                      <a:srgbClr val="ECF1F5"/>
                     </a:solidFill>
                   </a:tcPr>
                 </a:tc>
@@ -21715,7 +21530,7 @@
                       <a:tailEnd type="none" w="med" len="med"/>
                     </a:lnB>
                     <a:solidFill>
-                      <a:srgbClr val="ECF1F5"/>
+                      <a:srgbClr val="FFFFFF"/>
                     </a:solidFill>
                   </a:tcPr>
                 </a:tc>
@@ -21776,6 +21591,191 @@
                       <a:tailEnd type="none" w="med" len="med"/>
                     </a:lnB>
                     <a:solidFill>
+                      <a:srgbClr val="FFFFFF"/>
+                    </a:solidFill>
+                  </a:tcPr>
+                </a:tc>
+                <a:tc>
+                  <a:txBody>
+                    <a:bodyPr/>
+                    <a:lstStyle/>
+                    <a:p>
+                      <a:pPr indent="0" marL="0">
+                        <a:buNone/>
+                      </a:pPr>
+                      <a:r>
+                        <a:rPr lang="en-US" sz="1800" dirty="0">
+                          <a:solidFill>
+                            <a:srgbClr val="1B2A38"/>
+                          </a:solidFill>
+                        </a:rPr>
+                        <a:t>Modelling: tuned and pruned the Decision Tree, ran the final comparison and built the Streamlit web app.</a:t>
+                      </a:r>
+                      <a:endParaRPr lang="en-US" sz="1800" dirty="0"/>
+                    </a:p>
+                  </a:txBody>
+                  <a:tcPr marL="137160" marR="137160" marT="45720" marB="45720" anchor="ctr">
+                    <a:lnL w="9525" cap="flat" cmpd="sng" algn="ctr">
+                      <a:solidFill>
+                        <a:srgbClr val="C9D3DC"/>
+                      </a:solidFill>
+                      <a:prstDash val="solid"/>
+                      <a:round/>
+                      <a:headEnd type="none" w="med" len="med"/>
+                      <a:tailEnd type="none" w="med" len="med"/>
+                    </a:lnL>
+                    <a:lnR w="9525" cap="flat" cmpd="sng" algn="ctr">
+                      <a:solidFill>
+                        <a:srgbClr val="C9D3DC"/>
+                      </a:solidFill>
+                      <a:prstDash val="solid"/>
+                      <a:round/>
+                      <a:headEnd type="none" w="med" len="med"/>
+                      <a:tailEnd type="none" w="med" len="med"/>
+                    </a:lnR>
+                    <a:lnT w="9525" cap="flat" cmpd="sng" algn="ctr">
+                      <a:solidFill>
+                        <a:srgbClr val="C9D3DC"/>
+                      </a:solidFill>
+                      <a:prstDash val="solid"/>
+                      <a:round/>
+                      <a:headEnd type="none" w="med" len="med"/>
+                      <a:tailEnd type="none" w="med" len="med"/>
+                    </a:lnT>
+                    <a:lnB w="9525" cap="flat" cmpd="sng" algn="ctr">
+                      <a:solidFill>
+                        <a:srgbClr val="C9D3DC"/>
+                      </a:solidFill>
+                      <a:prstDash val="solid"/>
+                      <a:round/>
+                      <a:headEnd type="none" w="med" len="med"/>
+                      <a:tailEnd type="none" w="med" len="med"/>
+                    </a:lnB>
+                    <a:solidFill>
+                      <a:srgbClr val="FFFFFF"/>
+                    </a:solidFill>
+                  </a:tcPr>
+                </a:tc>
+              </a:tr>
+              <a:tr h="1024128">
+                <a:tc>
+                  <a:txBody>
+                    <a:bodyPr/>
+                    <a:lstStyle/>
+                    <a:p>
+                      <a:pPr indent="0" marL="0">
+                        <a:buNone/>
+                      </a:pPr>
+                      <a:r>
+                        <a:rPr lang="en-US" sz="1800" dirty="0">
+                          <a:solidFill>
+                            <a:srgbClr val="1B2A38"/>
+                          </a:solidFill>
+                        </a:rPr>
+                        <a:t>2401010221</a:t>
+                      </a:r>
+                      <a:endParaRPr lang="en-US" sz="1800" dirty="0"/>
+                    </a:p>
+                  </a:txBody>
+                  <a:tcPr marL="137160" marR="137160" marT="45720" marB="45720" anchor="ctr">
+                    <a:lnL w="9525" cap="flat" cmpd="sng" algn="ctr">
+                      <a:solidFill>
+                        <a:srgbClr val="C9D3DC"/>
+                      </a:solidFill>
+                      <a:prstDash val="solid"/>
+                      <a:round/>
+                      <a:headEnd type="none" w="med" len="med"/>
+                      <a:tailEnd type="none" w="med" len="med"/>
+                    </a:lnL>
+                    <a:lnR w="9525" cap="flat" cmpd="sng" algn="ctr">
+                      <a:solidFill>
+                        <a:srgbClr val="C9D3DC"/>
+                      </a:solidFill>
+                      <a:prstDash val="solid"/>
+                      <a:round/>
+                      <a:headEnd type="none" w="med" len="med"/>
+                      <a:tailEnd type="none" w="med" len="med"/>
+                    </a:lnR>
+                    <a:lnT w="9525" cap="flat" cmpd="sng" algn="ctr">
+                      <a:solidFill>
+                        <a:srgbClr val="C9D3DC"/>
+                      </a:solidFill>
+                      <a:prstDash val="solid"/>
+                      <a:round/>
+                      <a:headEnd type="none" w="med" len="med"/>
+                      <a:tailEnd type="none" w="med" len="med"/>
+                    </a:lnT>
+                    <a:lnB w="9525" cap="flat" cmpd="sng" algn="ctr">
+                      <a:solidFill>
+                        <a:srgbClr val="C9D3DC"/>
+                      </a:solidFill>
+                      <a:prstDash val="solid"/>
+                      <a:round/>
+                      <a:headEnd type="none" w="med" len="med"/>
+                      <a:tailEnd type="none" w="med" len="med"/>
+                    </a:lnB>
+                    <a:solidFill>
+                      <a:srgbClr val="ECF1F5"/>
+                    </a:solidFill>
+                  </a:tcPr>
+                </a:tc>
+                <a:tc>
+                  <a:txBody>
+                    <a:bodyPr/>
+                    <a:lstStyle/>
+                    <a:p>
+                      <a:pPr indent="0" marL="0">
+                        <a:buNone/>
+                      </a:pPr>
+                      <a:r>
+                        <a:rPr lang="en-US" sz="2000" b="1" dirty="0">
+                          <a:solidFill>
+                            <a:srgbClr val="1B2A38"/>
+                          </a:solidFill>
+                        </a:rPr>
+                        <a:t>Keshav</a:t>
+                      </a:r>
+                      <a:endParaRPr lang="en-US" sz="2000" dirty="0"/>
+                    </a:p>
+                  </a:txBody>
+                  <a:tcPr marL="137160" marR="137160" marT="45720" marB="45720" anchor="ctr">
+                    <a:lnL w="9525" cap="flat" cmpd="sng" algn="ctr">
+                      <a:solidFill>
+                        <a:srgbClr val="C9D3DC"/>
+                      </a:solidFill>
+                      <a:prstDash val="solid"/>
+                      <a:round/>
+                      <a:headEnd type="none" w="med" len="med"/>
+                      <a:tailEnd type="none" w="med" len="med"/>
+                    </a:lnL>
+                    <a:lnR w="9525" cap="flat" cmpd="sng" algn="ctr">
+                      <a:solidFill>
+                        <a:srgbClr val="C9D3DC"/>
+                      </a:solidFill>
+                      <a:prstDash val="solid"/>
+                      <a:round/>
+                      <a:headEnd type="none" w="med" len="med"/>
+                      <a:tailEnd type="none" w="med" len="med"/>
+                    </a:lnR>
+                    <a:lnT w="9525" cap="flat" cmpd="sng" algn="ctr">
+                      <a:solidFill>
+                        <a:srgbClr val="C9D3DC"/>
+                      </a:solidFill>
+                      <a:prstDash val="solid"/>
+                      <a:round/>
+                      <a:headEnd type="none" w="med" len="med"/>
+                      <a:tailEnd type="none" w="med" len="med"/>
+                    </a:lnT>
+                    <a:lnB w="9525" cap="flat" cmpd="sng" algn="ctr">
+                      <a:solidFill>
+                        <a:srgbClr val="C9D3DC"/>
+                      </a:solidFill>
+                      <a:prstDash val="solid"/>
+                      <a:round/>
+                      <a:headEnd type="none" w="med" len="med"/>
+                      <a:tailEnd type="none" w="med" len="med"/>
+                    </a:lnB>
+                    <a:solidFill>
                       <a:srgbClr val="ECF1F5"/>
                     </a:solidFill>
                   </a:tcPr>
@@ -21794,7 +21794,7 @@
                             <a:srgbClr val="1B2A38"/>
                           </a:solidFill>
                         </a:rPr>
-                        <a:t>Modelling: tuned the Decision Tree and Random Forest, ran the final comparison and built the Streamlit web app.</a:t>
+                        <a:t>Random Forest (best model): grid-searched and trained the 150-tree forest, analysed feature importance, raw vs. engineered features and early/late-life errors, and evaluated it on the test set.</a:t>
                       </a:r>
                       <a:endParaRPr lang="en-US" sz="1800" dirty="0"/>
                     </a:p>
